--- a/docs/ahg-2026/pre-event-message.pptx
+++ b/docs/ahg-2026/pre-event-message.pptx
@@ -3825,6 +3825,26 @@
             </a:r>
           </a:p>
           <a:p>
+            <a:pPr lvl="1">
+              <a:spcAft>
+                <a:spcPts val="600"/>
+              </a:spcAft>
+              <a:buNone/>
+            </a:pPr>
+            <a:r>
+              <a:rPr sz="2000" b="0" lang="en-US">
+                <a:latin typeface="Arial"/>
+              </a:rPr>
+              <a:t>4. </a:t>
+            </a:r>
+            <a:r>
+              <a:rPr sz="2000" b="0" lang="en-US">
+                <a:latin typeface="Arial"/>
+              </a:rPr>
+              <a:t>Answer the five-minute survey at letitglow.app/ahg/survey, so we have your path, your laptop and any access needs ready on the day.</a:t>
+            </a:r>
+          </a:p>
+          <a:p>
             <a:pPr marL="0" indent="0">
               <a:spcAft>
                 <a:spcPts val="600"/>
@@ -3942,7 +3962,7 @@
               <a:rPr sz="2000" b="0" lang="en-US">
                 <a:latin typeface="Arial"/>
               </a:rPr>
-              <a:t>Headphones, if you use a screen reader.</a:t>
+              <a:t>Headphones, if you use a screen reader. Read "If you use a screen reader" in the kit's README before the day; it is at letitglow.app/ahg/kit.</a:t>
             </a:r>
           </a:p>
           <a:p>
@@ -4062,7 +4082,7 @@
               <a:rPr sz="2000" b="0" lang="en-US">
                 <a:latin typeface="Arial"/>
               </a:rPr>
-              <a:t>Afternoon: share it to the open-source AHG 2026 collection on GitHub, with one form and your name on it, then add it to an agent team and watch the team work through the whole course.</a:t>
+              <a:t>Afternoon: add it to an agent team and watch the team work through the whole course, then share it to the open-source AHG 2026 collection on GitHub, with one form and your name on it.</a:t>
             </a:r>
           </a:p>
           <a:p>
